--- a/blog/vasta/images/_slideshow.pptx
+++ b/blog/vasta/images/_slideshow.pptx
@@ -5,10 +5,12 @@
     <p:sldMasterId id="2147483648" r:id="rId1"/>
   </p:sldMasterIdLst>
   <p:notesMasterIdLst>
-    <p:notesMasterId r:id="rId3"/>
+    <p:notesMasterId r:id="rId5"/>
   </p:notesMasterIdLst>
   <p:sldIdLst>
     <p:sldId id="256" r:id="rId2"/>
+    <p:sldId id="257" r:id="rId3"/>
+    <p:sldId id="258" r:id="rId4"/>
   </p:sldIdLst>
   <p:sldSz cx="12192000" cy="6858000"/>
   <p:notesSz cx="6858000" cy="9144000"/>
@@ -107,6 +109,11 @@
       </a:defRPr>
     </a:lvl9pPr>
   </p:defaultTextStyle>
+  <p:extLst>
+    <p:ext uri="{EFAFB233-063F-42B5-8137-9DF3F51BA10A}">
+      <p15:sldGuideLst xmlns:p15="http://schemas.microsoft.com/office/powerpoint/2012/main"/>
+    </p:ext>
+  </p:extLst>
 </p:presentation>
 </file>
 
@@ -192,7 +199,7 @@
           <a:p>
             <a:fld id="{1EF64A26-D5FE-1840-AF0E-A079BDF2B41B}" type="datetimeFigureOut">
               <a:rPr lang="en-US" smtClean="0"/>
-              <a:t>8/21/19</a:t>
+              <a:t>7/25/26</a:t>
             </a:fld>
             <a:endParaRPr lang="en-US"/>
           </a:p>
@@ -690,7 +697,7 @@
           <a:p>
             <a:fld id="{D3B4EE04-637E-DF4A-A534-218B82738425}" type="datetimeFigureOut">
               <a:rPr lang="en-US" smtClean="0"/>
-              <a:t>8/21/19</a:t>
+              <a:t>7/25/26</a:t>
             </a:fld>
             <a:endParaRPr lang="en-US"/>
           </a:p>
@@ -888,7 +895,7 @@
           <a:p>
             <a:fld id="{D3B4EE04-637E-DF4A-A534-218B82738425}" type="datetimeFigureOut">
               <a:rPr lang="en-US" smtClean="0"/>
-              <a:t>8/21/19</a:t>
+              <a:t>7/25/26</a:t>
             </a:fld>
             <a:endParaRPr lang="en-US"/>
           </a:p>
@@ -1096,7 +1103,7 @@
           <a:p>
             <a:fld id="{D3B4EE04-637E-DF4A-A534-218B82738425}" type="datetimeFigureOut">
               <a:rPr lang="en-US" smtClean="0"/>
-              <a:t>8/21/19</a:t>
+              <a:t>7/25/26</a:t>
             </a:fld>
             <a:endParaRPr lang="en-US"/>
           </a:p>
@@ -1294,7 +1301,7 @@
           <a:p>
             <a:fld id="{D3B4EE04-637E-DF4A-A534-218B82738425}" type="datetimeFigureOut">
               <a:rPr lang="en-US" smtClean="0"/>
-              <a:t>8/21/19</a:t>
+              <a:t>7/25/26</a:t>
             </a:fld>
             <a:endParaRPr lang="en-US"/>
           </a:p>
@@ -1569,7 +1576,7 @@
           <a:p>
             <a:fld id="{D3B4EE04-637E-DF4A-A534-218B82738425}" type="datetimeFigureOut">
               <a:rPr lang="en-US" smtClean="0"/>
-              <a:t>8/21/19</a:t>
+              <a:t>7/25/26</a:t>
             </a:fld>
             <a:endParaRPr lang="en-US"/>
           </a:p>
@@ -1834,7 +1841,7 @@
           <a:p>
             <a:fld id="{D3B4EE04-637E-DF4A-A534-218B82738425}" type="datetimeFigureOut">
               <a:rPr lang="en-US" smtClean="0"/>
-              <a:t>8/21/19</a:t>
+              <a:t>7/25/26</a:t>
             </a:fld>
             <a:endParaRPr lang="en-US"/>
           </a:p>
@@ -2246,7 +2253,7 @@
           <a:p>
             <a:fld id="{D3B4EE04-637E-DF4A-A534-218B82738425}" type="datetimeFigureOut">
               <a:rPr lang="en-US" smtClean="0"/>
-              <a:t>8/21/19</a:t>
+              <a:t>7/25/26</a:t>
             </a:fld>
             <a:endParaRPr lang="en-US"/>
           </a:p>
@@ -2387,7 +2394,7 @@
           <a:p>
             <a:fld id="{D3B4EE04-637E-DF4A-A534-218B82738425}" type="datetimeFigureOut">
               <a:rPr lang="en-US" smtClean="0"/>
-              <a:t>8/21/19</a:t>
+              <a:t>7/25/26</a:t>
             </a:fld>
             <a:endParaRPr lang="en-US"/>
           </a:p>
@@ -2500,7 +2507,7 @@
           <a:p>
             <a:fld id="{D3B4EE04-637E-DF4A-A534-218B82738425}" type="datetimeFigureOut">
               <a:rPr lang="en-US" smtClean="0"/>
-              <a:t>8/21/19</a:t>
+              <a:t>7/25/26</a:t>
             </a:fld>
             <a:endParaRPr lang="en-US"/>
           </a:p>
@@ -2811,7 +2818,7 @@
           <a:p>
             <a:fld id="{D3B4EE04-637E-DF4A-A534-218B82738425}" type="datetimeFigureOut">
               <a:rPr lang="en-US" smtClean="0"/>
-              <a:t>8/21/19</a:t>
+              <a:t>7/25/26</a:t>
             </a:fld>
             <a:endParaRPr lang="en-US"/>
           </a:p>
@@ -3099,7 +3106,7 @@
           <a:p>
             <a:fld id="{D3B4EE04-637E-DF4A-A534-218B82738425}" type="datetimeFigureOut">
               <a:rPr lang="en-US" smtClean="0"/>
-              <a:t>8/21/19</a:t>
+              <a:t>7/25/26</a:t>
             </a:fld>
             <a:endParaRPr lang="en-US"/>
           </a:p>
@@ -3340,7 +3347,7 @@
           <a:p>
             <a:fld id="{D3B4EE04-637E-DF4A-A534-218B82738425}" type="datetimeFigureOut">
               <a:rPr lang="en-US" smtClean="0"/>
-              <a:t>8/21/19</a:t>
+              <a:t>7/25/26</a:t>
             </a:fld>
             <a:endParaRPr lang="en-US"/>
           </a:p>
@@ -3769,62 +3776,6 @@
       </p:grpSpPr>
       <p:sp>
         <p:nvSpPr>
-          <p:cNvPr id="27" name="Rounded Rectangle 26">
-            <a:extLst>
-              <a:ext uri="{FF2B5EF4-FFF2-40B4-BE49-F238E27FC236}">
-                <a16:creationId xmlns:a16="http://schemas.microsoft.com/office/drawing/2014/main" id="{22974D34-1152-DA4D-A260-68CDB93501E6}"/>
-              </a:ext>
-            </a:extLst>
-          </p:cNvPr>
-          <p:cNvSpPr/>
-          <p:nvPr/>
-        </p:nvSpPr>
-        <p:spPr>
-          <a:xfrm>
-            <a:off x="2479153" y="6519446"/>
-            <a:ext cx="7233694" cy="338554"/>
-          </a:xfrm>
-          <a:prstGeom prst="roundRect">
-            <a:avLst>
-              <a:gd name="adj" fmla="val 50000"/>
-            </a:avLst>
-          </a:prstGeom>
-          <a:solidFill>
-            <a:schemeClr val="bg1">
-              <a:lumMod val="85000"/>
-            </a:schemeClr>
-          </a:solidFill>
-          <a:ln>
-            <a:noFill/>
-          </a:ln>
-        </p:spPr>
-        <p:style>
-          <a:lnRef idx="2">
-            <a:schemeClr val="accent1">
-              <a:shade val="50000"/>
-            </a:schemeClr>
-          </a:lnRef>
-          <a:fillRef idx="1">
-            <a:schemeClr val="accent1"/>
-          </a:fillRef>
-          <a:effectRef idx="0">
-            <a:schemeClr val="accent1"/>
-          </a:effectRef>
-          <a:fontRef idx="minor">
-            <a:schemeClr val="lt1"/>
-          </a:fontRef>
-        </p:style>
-        <p:txBody>
-          <a:bodyPr rtlCol="0" anchor="ctr"/>
-          <a:lstStyle/>
-          <a:p>
-            <a:pPr algn="ctr"/>
-            <a:endParaRPr lang="en-US"/>
-          </a:p>
-        </p:txBody>
-      </p:sp>
-      <p:sp>
-        <p:nvSpPr>
           <p:cNvPr id="25" name="Rounded Rectangle 24">
             <a:extLst>
               <a:ext uri="{FF2B5EF4-FFF2-40B4-BE49-F238E27FC236}">
@@ -4082,8 +4033,8 @@
           </p:nvSpPr>
           <p:spPr>
             <a:xfrm>
-              <a:off x="1584037" y="0"/>
-              <a:ext cx="9023927" cy="1138773"/>
+              <a:off x="332509" y="0"/>
+              <a:ext cx="11369635" cy="1138773"/>
             </a:xfrm>
             <a:prstGeom prst="rect">
               <a:avLst/>
@@ -4107,20 +4058,19 @@
                   </a:solidFill>
                   <a:latin typeface="Iowan Old Style Roman" panose="02040602040506020204" pitchFamily="18" charset="77"/>
                 </a:rPr>
-                <a:t>An intro to data visualization in R using ggplot2</a:t>
+                <a:t>Seeing what you hear: A practical introduction to Praat</a:t>
               </a:r>
-              <a:endParaRPr lang="en-US" dirty="0">
-                <a:solidFill>
-                  <a:schemeClr val="tx1">
-                    <a:lumMod val="95000"/>
-                    <a:lumOff val="5000"/>
-                  </a:schemeClr>
-                </a:solidFill>
-                <a:latin typeface="Iowan Old Style Roman" panose="02040602040506020204" pitchFamily="18" charset="77"/>
-              </a:endParaRPr>
-            </a:p>
-            <a:p>
-              <a:pPr algn="ctr"/>
+              <a:br>
+                <a:rPr lang="en-US" sz="3200" dirty="0">
+                  <a:solidFill>
+                    <a:schemeClr val="tx1">
+                      <a:lumMod val="95000"/>
+                      <a:lumOff val="5000"/>
+                    </a:schemeClr>
+                  </a:solidFill>
+                  <a:latin typeface="Iowan Old Style Roman" panose="02040602040506020204" pitchFamily="18" charset="77"/>
+                </a:rPr>
+              </a:br>
               <a:r>
                 <a:rPr lang="en-US" dirty="0">
                   <a:solidFill>
@@ -4131,7 +4081,7 @@
                   </a:solidFill>
                   <a:latin typeface="Iowan Old Style Roman" panose="02040602040506020204" pitchFamily="18" charset="77"/>
                 </a:rPr>
-                <a:t>Joey Stanley</a:t>
+                <a:t>Joey Stanley (Brigham Young University)</a:t>
               </a:r>
             </a:p>
             <a:p>
@@ -4170,7 +4120,7 @@
                   </a:solidFill>
                   <a:latin typeface="Iowan Old Style Roman" panose="02040602040506020204" pitchFamily="18" charset="77"/>
                 </a:rPr>
-                <a:t>	       @</a:t>
+                <a:t>	            </a:t>
               </a:r>
               <a:r>
                 <a:rPr lang="en-US" dirty="0" err="1">
@@ -4182,31 +4132,7 @@
                   </a:solidFill>
                   <a:latin typeface="Iowan Old Style Roman" panose="02040602040506020204" pitchFamily="18" charset="77"/>
                 </a:rPr>
-                <a:t>joey_stan</a:t>
-              </a:r>
-              <a:r>
-                <a:rPr lang="en-US" dirty="0">
-                  <a:solidFill>
-                    <a:schemeClr val="tx1">
-                      <a:lumMod val="95000"/>
-                      <a:lumOff val="5000"/>
-                    </a:schemeClr>
-                  </a:solidFill>
-                  <a:latin typeface="Iowan Old Style Roman" panose="02040602040506020204" pitchFamily="18" charset="77"/>
-                </a:rPr>
-                <a:t>	     </a:t>
-              </a:r>
-              <a:r>
-                <a:rPr lang="en-US" dirty="0" err="1">
-                  <a:solidFill>
-                    <a:schemeClr val="tx1">
-                      <a:lumMod val="95000"/>
-                      <a:lumOff val="5000"/>
-                    </a:schemeClr>
-                  </a:solidFill>
-                  <a:latin typeface="Iowan Old Style Roman" panose="02040602040506020204" pitchFamily="18" charset="77"/>
-                </a:rPr>
-                <a:t>joeystan@uga.edu</a:t>
+                <a:t>joey_stanley@byu.edu</a:t>
               </a:r>
               <a:endParaRPr lang="en-US" dirty="0">
                 <a:solidFill>
@@ -4269,7 +4195,7 @@
               <a:rPr lang="en-US" dirty="0">
                 <a:latin typeface="Iowan Old Style Roman" panose="02040602040506020204" pitchFamily="18" charset="77"/>
               </a:rPr>
-              <a:t>Ensure your computer is ready. You will need to download:</a:t>
+              <a:t>Ensure your computer is ready. You will need to have:</a:t>
             </a:r>
           </a:p>
           <a:p>
@@ -4281,7 +4207,7 @@
               <a:rPr lang="en-US" dirty="0">
                 <a:latin typeface="Iowan Old Style Roman" panose="02040602040506020204" pitchFamily="18" charset="77"/>
               </a:rPr>
-              <a:t>R</a:t>
+              <a:t>a microphone</a:t>
             </a:r>
           </a:p>
           <a:p>
@@ -4293,7 +4219,7 @@
               <a:rPr lang="en-US" dirty="0">
                 <a:latin typeface="Iowan Old Style Roman" panose="02040602040506020204" pitchFamily="18" charset="77"/>
               </a:rPr>
-              <a:t>R Studio</a:t>
+              <a:t>headphones (ideally wired)</a:t>
             </a:r>
           </a:p>
           <a:p>
@@ -4305,53 +4231,17 @@
               <a:rPr lang="en-US" dirty="0">
                 <a:latin typeface="Iowan Old Style Roman" panose="02040602040506020204" pitchFamily="18" charset="77"/>
               </a:rPr>
-              <a:t>ggplot2 / </a:t>
+              <a:t>access to </a:t>
             </a:r>
             <a:r>
               <a:rPr lang="en-US" dirty="0" err="1">
                 <a:latin typeface="Iowan Old Style Roman" panose="02040602040506020204" pitchFamily="18" charset="77"/>
               </a:rPr>
-              <a:t>tidyverse</a:t>
+              <a:t>praat.org</a:t>
             </a:r>
             <a:endParaRPr lang="en-US" dirty="0">
               <a:latin typeface="Iowan Old Style Roman" panose="02040602040506020204" pitchFamily="18" charset="77"/>
             </a:endParaRPr>
-          </a:p>
-          <a:p>
-            <a:pPr marL="285750" indent="-285750" algn="just">
-              <a:buFont typeface="Arial" panose="020B0604020202020204" pitchFamily="34" charset="0"/>
-              <a:buChar char="•"/>
-            </a:pPr>
-            <a:endParaRPr lang="en-US" dirty="0">
-              <a:latin typeface="Iowan Old Style Roman" panose="02040602040506020204" pitchFamily="18" charset="77"/>
-            </a:endParaRPr>
-          </a:p>
-          <a:p>
-            <a:pPr algn="just"/>
-            <a:r>
-              <a:rPr lang="en-US" dirty="0">
-                <a:latin typeface="Iowan Old Style Roman" panose="02040602040506020204" pitchFamily="18" charset="77"/>
-              </a:rPr>
-              <a:t>Visit </a:t>
-            </a:r>
-            <a:r>
-              <a:rPr lang="en-US" b="1" dirty="0" err="1">
-                <a:latin typeface="Iowan Old Style Roman" panose="02040602040506020204" pitchFamily="18" charset="77"/>
-              </a:rPr>
-              <a:t>joeystanley.com</a:t>
-            </a:r>
-            <a:r>
-              <a:rPr lang="en-US" b="1" dirty="0">
-                <a:latin typeface="Iowan Old Style Roman" panose="02040602040506020204" pitchFamily="18" charset="77"/>
-              </a:rPr>
-              <a:t>/setup</a:t>
-            </a:r>
-            <a:r>
-              <a:rPr lang="en-US" dirty="0">
-                <a:latin typeface="Iowan Old Style Roman" panose="02040602040506020204" pitchFamily="18" charset="77"/>
-              </a:rPr>
-              <a:t> for a walkthrough. </a:t>
-            </a:r>
           </a:p>
           <a:p>
             <a:pPr algn="just"/>
@@ -4420,12 +4310,6 @@
           </a:p>
           <a:p>
             <a:pPr algn="ctr"/>
-            <a:endParaRPr lang="en-US" dirty="0">
-              <a:latin typeface="Iowan Old Style Roman" panose="02040602040506020204" pitchFamily="18" charset="77"/>
-            </a:endParaRPr>
-          </a:p>
-          <a:p>
-            <a:pPr algn="ctr"/>
             <a:r>
               <a:rPr lang="en-US" dirty="0">
                 <a:latin typeface="Iowan Old Style Roman" panose="02040602040506020204" pitchFamily="18" charset="77"/>
@@ -4445,8 +4329,17 @@
               <a:rPr lang="en-US" b="1" dirty="0">
                 <a:latin typeface="Iowan Old Style Roman" panose="02040602040506020204" pitchFamily="18" charset="77"/>
               </a:rPr>
-              <a:t>/today</a:t>
-            </a:r>
+              <a:t>/</a:t>
+            </a:r>
+            <a:r>
+              <a:rPr lang="en-US" b="1" dirty="0" err="1">
+                <a:latin typeface="Iowan Old Style Roman" panose="02040602040506020204" pitchFamily="18" charset="77"/>
+              </a:rPr>
+              <a:t>vasta</a:t>
+            </a:r>
+            <a:endParaRPr lang="en-US" b="1" dirty="0">
+              <a:latin typeface="Iowan Old Style Roman" panose="02040602040506020204" pitchFamily="18" charset="77"/>
+            </a:endParaRPr>
           </a:p>
         </p:txBody>
       </p:sp>
@@ -4522,56 +4415,56 @@
               <a:rPr lang="en-US" b="1" dirty="0">
                 <a:latin typeface="Iowan Old Style Roman" panose="02040602040506020204" pitchFamily="18" charset="77"/>
               </a:rPr>
-              <a:t>/r</a:t>
+              <a:t>/</a:t>
+            </a:r>
+            <a:r>
+              <a:rPr lang="en-US" b="1" dirty="0" err="1">
+                <a:latin typeface="Iowan Old Style Roman" panose="02040602040506020204" pitchFamily="18" charset="77"/>
+              </a:rPr>
+              <a:t>praat</a:t>
             </a:r>
             <a:endParaRPr lang="en-US" dirty="0">
               <a:latin typeface="Iowan Old Style Roman" panose="02040602040506020204" pitchFamily="18" charset="77"/>
             </a:endParaRPr>
           </a:p>
-          <a:p>
-            <a:pPr algn="ctr"/>
-            <a:endParaRPr lang="en-US" dirty="0">
-              <a:latin typeface="Iowan Old Style Roman" panose="02040602040506020204" pitchFamily="18" charset="77"/>
-            </a:endParaRPr>
-          </a:p>
-          <a:p>
-            <a:pPr algn="ctr"/>
-            <a:endParaRPr lang="en-US" dirty="0">
-              <a:latin typeface="Iowan Old Style Roman" panose="02040602040506020204" pitchFamily="18" charset="77"/>
-            </a:endParaRPr>
-          </a:p>
-          <a:p>
-            <a:pPr algn="ctr"/>
-            <a:r>
-              <a:rPr lang="en-US" dirty="0">
-                <a:latin typeface="Iowan Old Style Roman" panose="02040602040506020204" pitchFamily="18" charset="77"/>
-              </a:rPr>
-              <a:t>Give me feedback:</a:t>
-            </a:r>
-          </a:p>
-          <a:p>
-            <a:pPr algn="ctr"/>
-            <a:r>
-              <a:rPr lang="en-US" b="1" dirty="0" err="1">
-                <a:latin typeface="Iowan Old Style Roman" panose="02040602040506020204" pitchFamily="18" charset="77"/>
-              </a:rPr>
-              <a:t>joeystanley.com</a:t>
-            </a:r>
-            <a:r>
-              <a:rPr lang="en-US" b="1" dirty="0">
-                <a:latin typeface="Iowan Old Style Roman" panose="02040602040506020204" pitchFamily="18" charset="77"/>
-              </a:rPr>
-              <a:t>/feedback</a:t>
-            </a:r>
-          </a:p>
-        </p:txBody>
-      </p:sp>
-      <p:sp>
-        <p:nvSpPr>
-          <p:cNvPr id="10" name="TextBox 9">
-            <a:extLst>
-              <a:ext uri="{FF2B5EF4-FFF2-40B4-BE49-F238E27FC236}">
-                <a16:creationId xmlns:a16="http://schemas.microsoft.com/office/drawing/2014/main" id="{C362EEE8-3BDA-D04B-BAC7-392EC8F9B9E2}"/>
+        </p:txBody>
+      </p:sp>
+    </p:spTree>
+    <p:extLst>
+      <p:ext uri="{BB962C8B-B14F-4D97-AF65-F5344CB8AC3E}">
+        <p14:creationId xmlns:p14="http://schemas.microsoft.com/office/powerpoint/2010/main" val="232409566"/>
+      </p:ext>
+    </p:extLst>
+  </p:cSld>
+  <p:clrMapOvr>
+    <a:masterClrMapping/>
+  </p:clrMapOvr>
+</p:sld>
+</file>
+
+<file path=ppt/slides/slide2.xml><?xml version="1.0" encoding="utf-8"?>
+<p:sld xmlns:a="http://schemas.openxmlformats.org/drawingml/2006/main" xmlns:r="http://schemas.openxmlformats.org/officeDocument/2006/relationships" xmlns:p="http://schemas.openxmlformats.org/presentationml/2006/main">
+  <p:cSld>
+    <p:spTree>
+      <p:nvGrpSpPr>
+        <p:cNvPr id="1" name=""/>
+        <p:cNvGrpSpPr/>
+        <p:nvPr/>
+      </p:nvGrpSpPr>
+      <p:grpSpPr>
+        <a:xfrm>
+          <a:off x="0" y="0"/>
+          <a:ext cx="0" cy="0"/>
+          <a:chOff x="0" y="0"/>
+          <a:chExt cx="0" cy="0"/>
+        </a:xfrm>
+      </p:grpSpPr>
+      <p:sp>
+        <p:nvSpPr>
+          <p:cNvPr id="5" name="TextBox 4">
+            <a:extLst>
+              <a:ext uri="{FF2B5EF4-FFF2-40B4-BE49-F238E27FC236}">
+                <a16:creationId xmlns:a16="http://schemas.microsoft.com/office/drawing/2014/main" id="{339075CB-E746-D42E-F9D0-0BF237E92BAA}"/>
               </a:ext>
             </a:extLst>
           </p:cNvPr>
@@ -4580,8 +4473,8 @@
         </p:nvSpPr>
         <p:spPr>
           <a:xfrm>
-            <a:off x="2842741" y="6519446"/>
-            <a:ext cx="6506526" cy="338554"/>
+            <a:off x="1201068" y="763291"/>
+            <a:ext cx="10267032" cy="4820422"/>
           </a:xfrm>
           <a:prstGeom prst="rect">
             <a:avLst/>
@@ -4589,25 +4482,1099 @@
           <a:noFill/>
         </p:spPr>
         <p:txBody>
-          <a:bodyPr wrap="none" rtlCol="0">
+          <a:bodyPr wrap="square">
             <a:spAutoFit/>
           </a:bodyPr>
           <a:lstStyle/>
           <a:p>
-            <a:pPr algn="ctr"/>
-            <a:r>
-              <a:rPr lang="en-US" sz="1600" dirty="0">
-                <a:latin typeface="Iowan Old Style Roman" panose="02040602040506020204" pitchFamily="18" charset="77"/>
+            <a:pPr marL="0" marR="0">
+              <a:lnSpc>
+                <a:spcPct val="115000"/>
+              </a:lnSpc>
+              <a:spcAft>
+                <a:spcPts val="800"/>
+              </a:spcAft>
+              <a:buNone/>
+            </a:pPr>
+            <a:r>
+              <a:rPr lang="en-US" sz="2000" kern="100" dirty="0">
+                <a:effectLst/>
+                <a:latin typeface="BITSTREAM IOWAN OLD STYLE BT" panose="02040602040506020204" pitchFamily="18" charset="0"/>
+                <a:ea typeface="Aptos" panose="020B0004020202020204" pitchFamily="34" charset="0"/>
+                <a:cs typeface="Times New Roman" panose="02020603050405020304" pitchFamily="18" charset="0"/>
               </a:rPr>
-              <a:t>Also, if you can’t read this line of text, sit somewhere where you can.</a:t>
-            </a:r>
+              <a:t>Record yourself saying the following sentence:</a:t>
+            </a:r>
+            <a:endParaRPr lang="en-US" sz="1200" kern="100" dirty="0">
+              <a:effectLst/>
+              <a:latin typeface="Aptos" panose="020B0004020202020204" pitchFamily="34" charset="0"/>
+              <a:ea typeface="Aptos" panose="020B0004020202020204" pitchFamily="34" charset="0"/>
+              <a:cs typeface="Times New Roman" panose="02020603050405020304" pitchFamily="18" charset="0"/>
+            </a:endParaRPr>
+          </a:p>
+          <a:p>
+            <a:pPr marL="0" marR="0">
+              <a:lnSpc>
+                <a:spcPct val="115000"/>
+              </a:lnSpc>
+              <a:spcAft>
+                <a:spcPts val="800"/>
+              </a:spcAft>
+              <a:buNone/>
+            </a:pPr>
+            <a:r>
+              <a:rPr lang="en-US" sz="2000" kern="100" dirty="0">
+                <a:effectLst/>
+                <a:latin typeface="BITSTREAM IOWAN OLD STYLE BT" panose="02040602040506020204" pitchFamily="18" charset="0"/>
+                <a:ea typeface="Aptos" panose="020B0004020202020204" pitchFamily="34" charset="0"/>
+                <a:cs typeface="Times New Roman" panose="02020603050405020304" pitchFamily="18" charset="0"/>
+              </a:rPr>
+              <a:t> </a:t>
+            </a:r>
+            <a:endParaRPr lang="en-US" sz="1200" kern="100" dirty="0">
+              <a:effectLst/>
+              <a:latin typeface="Aptos" panose="020B0004020202020204" pitchFamily="34" charset="0"/>
+              <a:ea typeface="Aptos" panose="020B0004020202020204" pitchFamily="34" charset="0"/>
+              <a:cs typeface="Times New Roman" panose="02020603050405020304" pitchFamily="18" charset="0"/>
+            </a:endParaRPr>
+          </a:p>
+          <a:p>
+            <a:pPr marL="0" marR="0">
+              <a:lnSpc>
+                <a:spcPct val="115000"/>
+              </a:lnSpc>
+              <a:spcAft>
+                <a:spcPts val="800"/>
+              </a:spcAft>
+              <a:buNone/>
+            </a:pPr>
+            <a:r>
+              <a:rPr lang="en-US" sz="4400" kern="100" dirty="0">
+                <a:effectLst/>
+                <a:latin typeface="BITSTREAM IOWAN OLD STYLE BT" panose="02040602040506020204" pitchFamily="18" charset="0"/>
+                <a:ea typeface="Aptos" panose="020B0004020202020204" pitchFamily="34" charset="0"/>
+                <a:cs typeface="Times New Roman" panose="02020603050405020304" pitchFamily="18" charset="0"/>
+              </a:rPr>
+              <a:t>“She tried to make herself sound younger than she was, the way adults did when talking to little babies.”</a:t>
+            </a:r>
+            <a:endParaRPr lang="en-US" sz="2800" kern="100" dirty="0">
+              <a:effectLst/>
+              <a:latin typeface="Aptos" panose="020B0004020202020204" pitchFamily="34" charset="0"/>
+              <a:ea typeface="Aptos" panose="020B0004020202020204" pitchFamily="34" charset="0"/>
+              <a:cs typeface="Times New Roman" panose="02020603050405020304" pitchFamily="18" charset="0"/>
+            </a:endParaRPr>
+          </a:p>
+          <a:p>
+            <a:pPr marL="0" marR="0">
+              <a:lnSpc>
+                <a:spcPct val="115000"/>
+              </a:lnSpc>
+              <a:spcAft>
+                <a:spcPts val="800"/>
+              </a:spcAft>
+              <a:buNone/>
+            </a:pPr>
+            <a:r>
+              <a:rPr lang="en-US" sz="2000" kern="100" dirty="0">
+                <a:effectLst/>
+                <a:latin typeface="BITSTREAM IOWAN OLD STYLE BT" panose="02040602040506020204" pitchFamily="18" charset="0"/>
+                <a:ea typeface="Aptos" panose="020B0004020202020204" pitchFamily="34" charset="0"/>
+                <a:cs typeface="Times New Roman" panose="02020603050405020304" pitchFamily="18" charset="0"/>
+              </a:rPr>
+              <a:t> </a:t>
+            </a:r>
+            <a:endParaRPr lang="en-US" sz="1200" kern="100" dirty="0">
+              <a:effectLst/>
+              <a:latin typeface="Aptos" panose="020B0004020202020204" pitchFamily="34" charset="0"/>
+              <a:ea typeface="Aptos" panose="020B0004020202020204" pitchFamily="34" charset="0"/>
+              <a:cs typeface="Times New Roman" panose="02020603050405020304" pitchFamily="18" charset="0"/>
+            </a:endParaRPr>
+          </a:p>
+          <a:p>
+            <a:pPr>
+              <a:buNone/>
+            </a:pPr>
+            <a:br>
+              <a:rPr lang="en-US" sz="2000" dirty="0">
+                <a:effectLst/>
+                <a:latin typeface="BITSTREAM IOWAN OLD STYLE BT" panose="02040602040506020204" pitchFamily="18" charset="0"/>
+                <a:ea typeface="Aptos" panose="020B0004020202020204" pitchFamily="34" charset="0"/>
+                <a:cs typeface="Times New Roman" panose="02020603050405020304" pitchFamily="18" charset="0"/>
+              </a:rPr>
+            </a:br>
+            <a:endParaRPr lang="en-US" dirty="0">
+              <a:effectLst/>
+            </a:endParaRPr>
+          </a:p>
+          <a:p>
+            <a:pPr marL="0" marR="0">
+              <a:lnSpc>
+                <a:spcPct val="115000"/>
+              </a:lnSpc>
+              <a:spcAft>
+                <a:spcPts val="800"/>
+              </a:spcAft>
+              <a:buNone/>
+            </a:pPr>
+            <a:r>
+              <a:rPr lang="en-US" sz="2000" kern="100" dirty="0">
+                <a:effectLst/>
+                <a:latin typeface="BITSTREAM IOWAN OLD STYLE BT" panose="02040602040506020204" pitchFamily="18" charset="0"/>
+                <a:ea typeface="Aptos" panose="020B0004020202020204" pitchFamily="34" charset="0"/>
+                <a:cs typeface="Times New Roman" panose="02020603050405020304" pitchFamily="18" charset="0"/>
+              </a:rPr>
+              <a:t> </a:t>
+            </a:r>
+            <a:endParaRPr lang="en-US" sz="1200" kern="100" dirty="0">
+              <a:effectLst/>
+              <a:latin typeface="Aptos" panose="020B0004020202020204" pitchFamily="34" charset="0"/>
+              <a:ea typeface="Aptos" panose="020B0004020202020204" pitchFamily="34" charset="0"/>
+              <a:cs typeface="Times New Roman" panose="02020603050405020304" pitchFamily="18" charset="0"/>
+            </a:endParaRPr>
           </a:p>
         </p:txBody>
       </p:sp>
     </p:spTree>
     <p:extLst>
       <p:ext uri="{BB962C8B-B14F-4D97-AF65-F5344CB8AC3E}">
-        <p14:creationId xmlns:p14="http://schemas.microsoft.com/office/powerpoint/2010/main" val="232409566"/>
+        <p14:creationId xmlns:p14="http://schemas.microsoft.com/office/powerpoint/2010/main" val="2681555269"/>
+      </p:ext>
+    </p:extLst>
+  </p:cSld>
+  <p:clrMapOvr>
+    <a:masterClrMapping/>
+  </p:clrMapOvr>
+</p:sld>
+</file>
+
+<file path=ppt/slides/slide3.xml><?xml version="1.0" encoding="utf-8"?>
+<p:sld xmlns:a="http://schemas.openxmlformats.org/drawingml/2006/main" xmlns:r="http://schemas.openxmlformats.org/officeDocument/2006/relationships" xmlns:p="http://schemas.openxmlformats.org/presentationml/2006/main">
+  <p:cSld>
+    <p:spTree>
+      <p:nvGrpSpPr>
+        <p:cNvPr id="1" name=""/>
+        <p:cNvGrpSpPr/>
+        <p:nvPr/>
+      </p:nvGrpSpPr>
+      <p:grpSpPr>
+        <a:xfrm>
+          <a:off x="0" y="0"/>
+          <a:ext cx="0" cy="0"/>
+          <a:chOff x="0" y="0"/>
+          <a:chExt cx="0" cy="0"/>
+        </a:xfrm>
+      </p:grpSpPr>
+      <p:graphicFrame>
+        <p:nvGraphicFramePr>
+          <p:cNvPr id="2" name="Table 1">
+            <a:extLst>
+              <a:ext uri="{FF2B5EF4-FFF2-40B4-BE49-F238E27FC236}">
+                <a16:creationId xmlns:a16="http://schemas.microsoft.com/office/drawing/2014/main" id="{16090DC3-7CB1-1F82-C912-8EC5BD84130B}"/>
+              </a:ext>
+            </a:extLst>
+          </p:cNvPr>
+          <p:cNvGraphicFramePr>
+            <a:graphicFrameLocks noGrp="1"/>
+          </p:cNvGraphicFramePr>
+          <p:nvPr>
+            <p:extLst>
+              <p:ext uri="{D42A27DB-BD31-4B8C-83A1-F6EECF244321}">
+                <p14:modId xmlns:p14="http://schemas.microsoft.com/office/powerpoint/2010/main" val="4072309710"/>
+              </p:ext>
+            </p:extLst>
+          </p:nvPr>
+        </p:nvGraphicFramePr>
+        <p:xfrm>
+          <a:off x="3268345" y="2090578"/>
+          <a:ext cx="5655310" cy="2560320"/>
+        </p:xfrm>
+        <a:graphic>
+          <a:graphicData uri="http://schemas.openxmlformats.org/drawingml/2006/table">
+            <a:tbl>
+              <a:tblPr firstRow="1" firstCol="1" bandRow="1">
+                <a:tableStyleId>{2D5ABB26-0587-4C30-8999-92F81FD0307C}</a:tableStyleId>
+              </a:tblPr>
+              <a:tblGrid>
+                <a:gridCol w="963930">
+                  <a:extLst>
+                    <a:ext uri="{9D8B030D-6E8A-4147-A177-3AD203B41FA5}">
+                      <a16:colId xmlns:a16="http://schemas.microsoft.com/office/drawing/2014/main" val="585082985"/>
+                    </a:ext>
+                  </a:extLst>
+                </a:gridCol>
+                <a:gridCol w="894715">
+                  <a:extLst>
+                    <a:ext uri="{9D8B030D-6E8A-4147-A177-3AD203B41FA5}">
+                      <a16:colId xmlns:a16="http://schemas.microsoft.com/office/drawing/2014/main" val="1103091306"/>
+                    </a:ext>
+                  </a:extLst>
+                </a:gridCol>
+                <a:gridCol w="867410">
+                  <a:extLst>
+                    <a:ext uri="{9D8B030D-6E8A-4147-A177-3AD203B41FA5}">
+                      <a16:colId xmlns:a16="http://schemas.microsoft.com/office/drawing/2014/main" val="544847983"/>
+                    </a:ext>
+                  </a:extLst>
+                </a:gridCol>
+                <a:gridCol w="1017905">
+                  <a:extLst>
+                    <a:ext uri="{9D8B030D-6E8A-4147-A177-3AD203B41FA5}">
+                      <a16:colId xmlns:a16="http://schemas.microsoft.com/office/drawing/2014/main" val="135129880"/>
+                    </a:ext>
+                  </a:extLst>
+                </a:gridCol>
+                <a:gridCol w="894080">
+                  <a:extLst>
+                    <a:ext uri="{9D8B030D-6E8A-4147-A177-3AD203B41FA5}">
+                      <a16:colId xmlns:a16="http://schemas.microsoft.com/office/drawing/2014/main" val="2091217199"/>
+                    </a:ext>
+                  </a:extLst>
+                </a:gridCol>
+                <a:gridCol w="1017270">
+                  <a:extLst>
+                    <a:ext uri="{9D8B030D-6E8A-4147-A177-3AD203B41FA5}">
+                      <a16:colId xmlns:a16="http://schemas.microsoft.com/office/drawing/2014/main" val="1881924288"/>
+                    </a:ext>
+                  </a:extLst>
+                </a:gridCol>
+              </a:tblGrid>
+              <a:tr h="640080">
+                <a:tc>
+                  <a:txBody>
+                    <a:bodyPr/>
+                    <a:lstStyle/>
+                    <a:p>
+                      <a:pPr marL="0" marR="0" algn="ctr">
+                        <a:lnSpc>
+                          <a:spcPct val="115000"/>
+                        </a:lnSpc>
+                        <a:spcAft>
+                          <a:spcPts val="800"/>
+                        </a:spcAft>
+                        <a:buNone/>
+                      </a:pPr>
+                      <a:r>
+                        <a:rPr lang="en-US" sz="2800" kern="100" dirty="0">
+                          <a:effectLst/>
+                        </a:rPr>
+                        <a:t>tack</a:t>
+                      </a:r>
+                      <a:endParaRPr lang="en-US" sz="1200" kern="100" dirty="0">
+                        <a:effectLst/>
+                        <a:latin typeface="Aptos" panose="020B0004020202020204" pitchFamily="34" charset="0"/>
+                        <a:ea typeface="Aptos" panose="020B0004020202020204" pitchFamily="34" charset="0"/>
+                        <a:cs typeface="Times New Roman" panose="02020603050405020304" pitchFamily="18" charset="0"/>
+                      </a:endParaRPr>
+                    </a:p>
+                  </a:txBody>
+                  <a:tcPr marL="68580" marR="68580" marT="0" marB="0" anchor="ctr"/>
+                </a:tc>
+                <a:tc>
+                  <a:txBody>
+                    <a:bodyPr/>
+                    <a:lstStyle/>
+                    <a:p>
+                      <a:pPr marL="0" marR="0" algn="ctr">
+                        <a:lnSpc>
+                          <a:spcPct val="115000"/>
+                        </a:lnSpc>
+                        <a:spcAft>
+                          <a:spcPts val="800"/>
+                        </a:spcAft>
+                        <a:buNone/>
+                      </a:pPr>
+                      <a:r>
+                        <a:rPr lang="en-US" sz="2800" kern="100">
+                          <a:effectLst/>
+                        </a:rPr>
+                        <a:t>soup</a:t>
+                      </a:r>
+                      <a:endParaRPr lang="en-US" sz="1200" kern="100">
+                        <a:effectLst/>
+                        <a:latin typeface="Aptos" panose="020B0004020202020204" pitchFamily="34" charset="0"/>
+                        <a:ea typeface="Aptos" panose="020B0004020202020204" pitchFamily="34" charset="0"/>
+                        <a:cs typeface="Times New Roman" panose="02020603050405020304" pitchFamily="18" charset="0"/>
+                      </a:endParaRPr>
+                    </a:p>
+                  </a:txBody>
+                  <a:tcPr marL="68580" marR="68580" marT="0" marB="0" anchor="ctr"/>
+                </a:tc>
+                <a:tc>
+                  <a:txBody>
+                    <a:bodyPr/>
+                    <a:lstStyle/>
+                    <a:p>
+                      <a:pPr marL="0" marR="0" algn="ctr">
+                        <a:lnSpc>
+                          <a:spcPct val="115000"/>
+                        </a:lnSpc>
+                        <a:spcAft>
+                          <a:spcPts val="800"/>
+                        </a:spcAft>
+                        <a:buNone/>
+                      </a:pPr>
+                      <a:r>
+                        <a:rPr lang="en-US" sz="2800" kern="100">
+                          <a:effectLst/>
+                        </a:rPr>
+                        <a:t>days</a:t>
+                      </a:r>
+                      <a:endParaRPr lang="en-US" sz="1200" kern="100">
+                        <a:effectLst/>
+                        <a:latin typeface="Aptos" panose="020B0004020202020204" pitchFamily="34" charset="0"/>
+                        <a:ea typeface="Aptos" panose="020B0004020202020204" pitchFamily="34" charset="0"/>
+                        <a:cs typeface="Times New Roman" panose="02020603050405020304" pitchFamily="18" charset="0"/>
+                      </a:endParaRPr>
+                    </a:p>
+                  </a:txBody>
+                  <a:tcPr marL="68580" marR="68580" marT="0" marB="0" anchor="ctr"/>
+                </a:tc>
+                <a:tc>
+                  <a:txBody>
+                    <a:bodyPr/>
+                    <a:lstStyle/>
+                    <a:p>
+                      <a:pPr marL="0" marR="0" algn="ctr">
+                        <a:lnSpc>
+                          <a:spcPct val="115000"/>
+                        </a:lnSpc>
+                        <a:spcAft>
+                          <a:spcPts val="800"/>
+                        </a:spcAft>
+                        <a:buNone/>
+                      </a:pPr>
+                      <a:r>
+                        <a:rPr lang="en-US" sz="2800" kern="100">
+                          <a:effectLst/>
+                        </a:rPr>
+                        <a:t>shoot</a:t>
+                      </a:r>
+                      <a:endParaRPr lang="en-US" sz="1200" kern="100">
+                        <a:effectLst/>
+                        <a:latin typeface="Aptos" panose="020B0004020202020204" pitchFamily="34" charset="0"/>
+                        <a:ea typeface="Aptos" panose="020B0004020202020204" pitchFamily="34" charset="0"/>
+                        <a:cs typeface="Times New Roman" panose="02020603050405020304" pitchFamily="18" charset="0"/>
+                      </a:endParaRPr>
+                    </a:p>
+                  </a:txBody>
+                  <a:tcPr marL="68580" marR="68580" marT="0" marB="0" anchor="ctr"/>
+                </a:tc>
+                <a:tc>
+                  <a:txBody>
+                    <a:bodyPr/>
+                    <a:lstStyle/>
+                    <a:p>
+                      <a:pPr marL="0" marR="0" algn="ctr">
+                        <a:lnSpc>
+                          <a:spcPct val="115000"/>
+                        </a:lnSpc>
+                        <a:spcAft>
+                          <a:spcPts val="800"/>
+                        </a:spcAft>
+                        <a:buNone/>
+                      </a:pPr>
+                      <a:r>
+                        <a:rPr lang="en-US" sz="2800" kern="100">
+                          <a:effectLst/>
+                        </a:rPr>
+                        <a:t>pad</a:t>
+                      </a:r>
+                      <a:endParaRPr lang="en-US" sz="1200" kern="100">
+                        <a:effectLst/>
+                        <a:latin typeface="Aptos" panose="020B0004020202020204" pitchFamily="34" charset="0"/>
+                        <a:ea typeface="Aptos" panose="020B0004020202020204" pitchFamily="34" charset="0"/>
+                        <a:cs typeface="Times New Roman" panose="02020603050405020304" pitchFamily="18" charset="0"/>
+                      </a:endParaRPr>
+                    </a:p>
+                  </a:txBody>
+                  <a:tcPr marL="68580" marR="68580" marT="0" marB="0" anchor="ctr"/>
+                </a:tc>
+                <a:tc>
+                  <a:txBody>
+                    <a:bodyPr/>
+                    <a:lstStyle/>
+                    <a:p>
+                      <a:pPr marL="0" marR="0" algn="ctr">
+                        <a:lnSpc>
+                          <a:spcPct val="115000"/>
+                        </a:lnSpc>
+                        <a:spcAft>
+                          <a:spcPts val="800"/>
+                        </a:spcAft>
+                        <a:buNone/>
+                      </a:pPr>
+                      <a:r>
+                        <a:rPr lang="en-US" sz="2800" kern="100">
+                          <a:effectLst/>
+                        </a:rPr>
+                        <a:t>dill</a:t>
+                      </a:r>
+                      <a:endParaRPr lang="en-US" sz="1200" kern="100">
+                        <a:effectLst/>
+                        <a:latin typeface="Aptos" panose="020B0004020202020204" pitchFamily="34" charset="0"/>
+                        <a:ea typeface="Aptos" panose="020B0004020202020204" pitchFamily="34" charset="0"/>
+                        <a:cs typeface="Times New Roman" panose="02020603050405020304" pitchFamily="18" charset="0"/>
+                      </a:endParaRPr>
+                    </a:p>
+                  </a:txBody>
+                  <a:tcPr marL="68580" marR="68580" marT="0" marB="0" anchor="ctr"/>
+                </a:tc>
+                <a:extLst>
+                  <a:ext uri="{0D108BD9-81ED-4DB2-BD59-A6C34878D82A}">
+                    <a16:rowId xmlns:a16="http://schemas.microsoft.com/office/drawing/2014/main" val="4129464341"/>
+                  </a:ext>
+                </a:extLst>
+              </a:tr>
+              <a:tr h="640080">
+                <a:tc>
+                  <a:txBody>
+                    <a:bodyPr/>
+                    <a:lstStyle/>
+                    <a:p>
+                      <a:pPr marL="0" marR="0" algn="ctr">
+                        <a:lnSpc>
+                          <a:spcPct val="115000"/>
+                        </a:lnSpc>
+                        <a:spcAft>
+                          <a:spcPts val="800"/>
+                        </a:spcAft>
+                        <a:buNone/>
+                      </a:pPr>
+                      <a:r>
+                        <a:rPr lang="en-US" sz="2800" kern="100">
+                          <a:effectLst/>
+                        </a:rPr>
+                        <a:t>steep</a:t>
+                      </a:r>
+                      <a:endParaRPr lang="en-US" sz="1200" kern="100">
+                        <a:effectLst/>
+                        <a:latin typeface="Aptos" panose="020B0004020202020204" pitchFamily="34" charset="0"/>
+                        <a:ea typeface="Aptos" panose="020B0004020202020204" pitchFamily="34" charset="0"/>
+                        <a:cs typeface="Times New Roman" panose="02020603050405020304" pitchFamily="18" charset="0"/>
+                      </a:endParaRPr>
+                    </a:p>
+                  </a:txBody>
+                  <a:tcPr marL="68580" marR="68580" marT="0" marB="0" anchor="ctr"/>
+                </a:tc>
+                <a:tc>
+                  <a:txBody>
+                    <a:bodyPr/>
+                    <a:lstStyle/>
+                    <a:p>
+                      <a:pPr marL="0" marR="0" algn="ctr">
+                        <a:lnSpc>
+                          <a:spcPct val="115000"/>
+                        </a:lnSpc>
+                        <a:spcAft>
+                          <a:spcPts val="800"/>
+                        </a:spcAft>
+                        <a:buNone/>
+                      </a:pPr>
+                      <a:r>
+                        <a:rPr lang="en-US" sz="2800" kern="100" dirty="0">
+                          <a:effectLst/>
+                        </a:rPr>
+                        <a:t>sit</a:t>
+                      </a:r>
+                      <a:endParaRPr lang="en-US" sz="1200" kern="100" dirty="0">
+                        <a:effectLst/>
+                        <a:latin typeface="Aptos" panose="020B0004020202020204" pitchFamily="34" charset="0"/>
+                        <a:ea typeface="Aptos" panose="020B0004020202020204" pitchFamily="34" charset="0"/>
+                        <a:cs typeface="Times New Roman" panose="02020603050405020304" pitchFamily="18" charset="0"/>
+                      </a:endParaRPr>
+                    </a:p>
+                  </a:txBody>
+                  <a:tcPr marL="68580" marR="68580" marT="0" marB="0" anchor="ctr"/>
+                </a:tc>
+                <a:tc>
+                  <a:txBody>
+                    <a:bodyPr/>
+                    <a:lstStyle/>
+                    <a:p>
+                      <a:pPr marL="0" marR="0" algn="ctr">
+                        <a:lnSpc>
+                          <a:spcPct val="115000"/>
+                        </a:lnSpc>
+                        <a:spcAft>
+                          <a:spcPts val="800"/>
+                        </a:spcAft>
+                        <a:buNone/>
+                      </a:pPr>
+                      <a:r>
+                        <a:rPr lang="en-US" sz="2800" kern="100" dirty="0">
+                          <a:effectLst/>
+                        </a:rPr>
+                        <a:t>code</a:t>
+                      </a:r>
+                      <a:endParaRPr lang="en-US" sz="1200" kern="100" dirty="0">
+                        <a:effectLst/>
+                        <a:latin typeface="Aptos" panose="020B0004020202020204" pitchFamily="34" charset="0"/>
+                        <a:ea typeface="Aptos" panose="020B0004020202020204" pitchFamily="34" charset="0"/>
+                        <a:cs typeface="Times New Roman" panose="02020603050405020304" pitchFamily="18" charset="0"/>
+                      </a:endParaRPr>
+                    </a:p>
+                  </a:txBody>
+                  <a:tcPr marL="68580" marR="68580" marT="0" marB="0" anchor="ctr"/>
+                </a:tc>
+                <a:tc>
+                  <a:txBody>
+                    <a:bodyPr/>
+                    <a:lstStyle/>
+                    <a:p>
+                      <a:pPr marL="0" marR="0" algn="ctr">
+                        <a:lnSpc>
+                          <a:spcPct val="115000"/>
+                        </a:lnSpc>
+                        <a:spcAft>
+                          <a:spcPts val="800"/>
+                        </a:spcAft>
+                        <a:buNone/>
+                      </a:pPr>
+                      <a:r>
+                        <a:rPr lang="en-US" sz="2800" kern="100">
+                          <a:effectLst/>
+                        </a:rPr>
+                        <a:t>tab</a:t>
+                      </a:r>
+                      <a:endParaRPr lang="en-US" sz="1200" kern="100">
+                        <a:effectLst/>
+                        <a:latin typeface="Aptos" panose="020B0004020202020204" pitchFamily="34" charset="0"/>
+                        <a:ea typeface="Aptos" panose="020B0004020202020204" pitchFamily="34" charset="0"/>
+                        <a:cs typeface="Times New Roman" panose="02020603050405020304" pitchFamily="18" charset="0"/>
+                      </a:endParaRPr>
+                    </a:p>
+                  </a:txBody>
+                  <a:tcPr marL="68580" marR="68580" marT="0" marB="0" anchor="ctr"/>
+                </a:tc>
+                <a:tc>
+                  <a:txBody>
+                    <a:bodyPr/>
+                    <a:lstStyle/>
+                    <a:p>
+                      <a:pPr marL="0" marR="0" algn="ctr">
+                        <a:lnSpc>
+                          <a:spcPct val="115000"/>
+                        </a:lnSpc>
+                        <a:spcAft>
+                          <a:spcPts val="800"/>
+                        </a:spcAft>
+                        <a:buNone/>
+                      </a:pPr>
+                      <a:r>
+                        <a:rPr lang="en-US" sz="2800" kern="100">
+                          <a:effectLst/>
+                        </a:rPr>
+                        <a:t>bees</a:t>
+                      </a:r>
+                      <a:endParaRPr lang="en-US" sz="1200" kern="100">
+                        <a:effectLst/>
+                        <a:latin typeface="Aptos" panose="020B0004020202020204" pitchFamily="34" charset="0"/>
+                        <a:ea typeface="Aptos" panose="020B0004020202020204" pitchFamily="34" charset="0"/>
+                        <a:cs typeface="Times New Roman" panose="02020603050405020304" pitchFamily="18" charset="0"/>
+                      </a:endParaRPr>
+                    </a:p>
+                  </a:txBody>
+                  <a:tcPr marL="68580" marR="68580" marT="0" marB="0" anchor="ctr"/>
+                </a:tc>
+                <a:tc>
+                  <a:txBody>
+                    <a:bodyPr/>
+                    <a:lstStyle/>
+                    <a:p>
+                      <a:pPr marL="0" marR="0" algn="ctr">
+                        <a:lnSpc>
+                          <a:spcPct val="115000"/>
+                        </a:lnSpc>
+                        <a:spcAft>
+                          <a:spcPts val="800"/>
+                        </a:spcAft>
+                        <a:buNone/>
+                      </a:pPr>
+                      <a:r>
+                        <a:rPr lang="en-US" sz="2800" kern="100">
+                          <a:effectLst/>
+                        </a:rPr>
+                        <a:t>scope</a:t>
+                      </a:r>
+                      <a:endParaRPr lang="en-US" sz="1200" kern="100">
+                        <a:effectLst/>
+                        <a:latin typeface="Aptos" panose="020B0004020202020204" pitchFamily="34" charset="0"/>
+                        <a:ea typeface="Aptos" panose="020B0004020202020204" pitchFamily="34" charset="0"/>
+                        <a:cs typeface="Times New Roman" panose="02020603050405020304" pitchFamily="18" charset="0"/>
+                      </a:endParaRPr>
+                    </a:p>
+                  </a:txBody>
+                  <a:tcPr marL="68580" marR="68580" marT="0" marB="0" anchor="ctr"/>
+                </a:tc>
+                <a:extLst>
+                  <a:ext uri="{0D108BD9-81ED-4DB2-BD59-A6C34878D82A}">
+                    <a16:rowId xmlns:a16="http://schemas.microsoft.com/office/drawing/2014/main" val="3757954178"/>
+                  </a:ext>
+                </a:extLst>
+              </a:tr>
+              <a:tr h="640080">
+                <a:tc>
+                  <a:txBody>
+                    <a:bodyPr/>
+                    <a:lstStyle/>
+                    <a:p>
+                      <a:pPr marL="0" marR="0" algn="ctr">
+                        <a:lnSpc>
+                          <a:spcPct val="115000"/>
+                        </a:lnSpc>
+                        <a:spcAft>
+                          <a:spcPts val="800"/>
+                        </a:spcAft>
+                        <a:buNone/>
+                      </a:pPr>
+                      <a:r>
+                        <a:rPr lang="en-US" sz="2800" kern="100">
+                          <a:effectLst/>
+                        </a:rPr>
+                        <a:t>kill</a:t>
+                      </a:r>
+                      <a:endParaRPr lang="en-US" sz="1200" kern="100">
+                        <a:effectLst/>
+                        <a:latin typeface="Aptos" panose="020B0004020202020204" pitchFamily="34" charset="0"/>
+                        <a:ea typeface="Aptos" panose="020B0004020202020204" pitchFamily="34" charset="0"/>
+                        <a:cs typeface="Times New Roman" panose="02020603050405020304" pitchFamily="18" charset="0"/>
+                      </a:endParaRPr>
+                    </a:p>
+                  </a:txBody>
+                  <a:tcPr marL="68580" marR="68580" marT="0" marB="0" anchor="ctr"/>
+                </a:tc>
+                <a:tc>
+                  <a:txBody>
+                    <a:bodyPr/>
+                    <a:lstStyle/>
+                    <a:p>
+                      <a:pPr marL="0" marR="0" algn="ctr">
+                        <a:lnSpc>
+                          <a:spcPct val="115000"/>
+                        </a:lnSpc>
+                        <a:spcAft>
+                          <a:spcPts val="800"/>
+                        </a:spcAft>
+                        <a:buNone/>
+                      </a:pPr>
+                      <a:r>
+                        <a:rPr lang="en-US" sz="2800" kern="100">
+                          <a:effectLst/>
+                        </a:rPr>
+                        <a:t>dice</a:t>
+                      </a:r>
+                      <a:endParaRPr lang="en-US" sz="1200" kern="100">
+                        <a:effectLst/>
+                        <a:latin typeface="Aptos" panose="020B0004020202020204" pitchFamily="34" charset="0"/>
+                        <a:ea typeface="Aptos" panose="020B0004020202020204" pitchFamily="34" charset="0"/>
+                        <a:cs typeface="Times New Roman" panose="02020603050405020304" pitchFamily="18" charset="0"/>
+                      </a:endParaRPr>
+                    </a:p>
+                  </a:txBody>
+                  <a:tcPr marL="68580" marR="68580" marT="0" marB="0" anchor="ctr"/>
+                </a:tc>
+                <a:tc>
+                  <a:txBody>
+                    <a:bodyPr/>
+                    <a:lstStyle/>
+                    <a:p>
+                      <a:pPr marL="0" marR="0" algn="ctr">
+                        <a:lnSpc>
+                          <a:spcPct val="115000"/>
+                        </a:lnSpc>
+                        <a:spcAft>
+                          <a:spcPts val="800"/>
+                        </a:spcAft>
+                        <a:buNone/>
+                      </a:pPr>
+                      <a:r>
+                        <a:rPr lang="en-US" sz="2800" kern="100" dirty="0">
+                          <a:effectLst/>
+                        </a:rPr>
+                        <a:t>bash</a:t>
+                      </a:r>
+                      <a:endParaRPr lang="en-US" sz="1200" kern="100" dirty="0">
+                        <a:effectLst/>
+                        <a:latin typeface="Aptos" panose="020B0004020202020204" pitchFamily="34" charset="0"/>
+                        <a:ea typeface="Aptos" panose="020B0004020202020204" pitchFamily="34" charset="0"/>
+                        <a:cs typeface="Times New Roman" panose="02020603050405020304" pitchFamily="18" charset="0"/>
+                      </a:endParaRPr>
+                    </a:p>
+                  </a:txBody>
+                  <a:tcPr marL="68580" marR="68580" marT="0" marB="0" anchor="ctr"/>
+                </a:tc>
+                <a:tc>
+                  <a:txBody>
+                    <a:bodyPr/>
+                    <a:lstStyle/>
+                    <a:p>
+                      <a:pPr marL="0" marR="0" algn="ctr">
+                        <a:lnSpc>
+                          <a:spcPct val="115000"/>
+                        </a:lnSpc>
+                        <a:spcAft>
+                          <a:spcPts val="800"/>
+                        </a:spcAft>
+                        <a:buNone/>
+                      </a:pPr>
+                      <a:r>
+                        <a:rPr lang="en-US" sz="2800" kern="100" dirty="0">
+                          <a:effectLst/>
+                        </a:rPr>
+                        <a:t>goes</a:t>
+                      </a:r>
+                      <a:endParaRPr lang="en-US" sz="1200" kern="100" dirty="0">
+                        <a:effectLst/>
+                        <a:latin typeface="Aptos" panose="020B0004020202020204" pitchFamily="34" charset="0"/>
+                        <a:ea typeface="Aptos" panose="020B0004020202020204" pitchFamily="34" charset="0"/>
+                        <a:cs typeface="Times New Roman" panose="02020603050405020304" pitchFamily="18" charset="0"/>
+                      </a:endParaRPr>
+                    </a:p>
+                  </a:txBody>
+                  <a:tcPr marL="68580" marR="68580" marT="0" marB="0" anchor="ctr"/>
+                </a:tc>
+                <a:tc>
+                  <a:txBody>
+                    <a:bodyPr/>
+                    <a:lstStyle/>
+                    <a:p>
+                      <a:pPr marL="0" marR="0" algn="ctr">
+                        <a:lnSpc>
+                          <a:spcPct val="115000"/>
+                        </a:lnSpc>
+                        <a:spcAft>
+                          <a:spcPts val="800"/>
+                        </a:spcAft>
+                        <a:buNone/>
+                      </a:pPr>
+                      <a:r>
+                        <a:rPr lang="en-US" sz="2800" kern="100">
+                          <a:effectLst/>
+                        </a:rPr>
+                        <a:t>bus</a:t>
+                      </a:r>
+                      <a:endParaRPr lang="en-US" sz="1200" kern="100">
+                        <a:effectLst/>
+                        <a:latin typeface="Aptos" panose="020B0004020202020204" pitchFamily="34" charset="0"/>
+                        <a:ea typeface="Aptos" panose="020B0004020202020204" pitchFamily="34" charset="0"/>
+                        <a:cs typeface="Times New Roman" panose="02020603050405020304" pitchFamily="18" charset="0"/>
+                      </a:endParaRPr>
+                    </a:p>
+                  </a:txBody>
+                  <a:tcPr marL="68580" marR="68580" marT="0" marB="0" anchor="ctr"/>
+                </a:tc>
+                <a:tc>
+                  <a:txBody>
+                    <a:bodyPr/>
+                    <a:lstStyle/>
+                    <a:p>
+                      <a:pPr marL="0" marR="0" algn="ctr">
+                        <a:lnSpc>
+                          <a:spcPct val="115000"/>
+                        </a:lnSpc>
+                        <a:spcAft>
+                          <a:spcPts val="800"/>
+                        </a:spcAft>
+                        <a:buNone/>
+                      </a:pPr>
+                      <a:r>
+                        <a:rPr lang="en-US" sz="2800" kern="100" dirty="0">
+                          <a:effectLst/>
+                        </a:rPr>
+                        <a:t>seep</a:t>
+                      </a:r>
+                      <a:endParaRPr lang="en-US" sz="1200" kern="100" dirty="0">
+                        <a:effectLst/>
+                        <a:latin typeface="Aptos" panose="020B0004020202020204" pitchFamily="34" charset="0"/>
+                        <a:ea typeface="Aptos" panose="020B0004020202020204" pitchFamily="34" charset="0"/>
+                        <a:cs typeface="Times New Roman" panose="02020603050405020304" pitchFamily="18" charset="0"/>
+                      </a:endParaRPr>
+                    </a:p>
+                  </a:txBody>
+                  <a:tcPr marL="68580" marR="68580" marT="0" marB="0" anchor="ctr"/>
+                </a:tc>
+                <a:extLst>
+                  <a:ext uri="{0D108BD9-81ED-4DB2-BD59-A6C34878D82A}">
+                    <a16:rowId xmlns:a16="http://schemas.microsoft.com/office/drawing/2014/main" val="461810837"/>
+                  </a:ext>
+                </a:extLst>
+              </a:tr>
+              <a:tr h="640080">
+                <a:tc>
+                  <a:txBody>
+                    <a:bodyPr/>
+                    <a:lstStyle/>
+                    <a:p>
+                      <a:pPr marL="0" marR="0" algn="ctr">
+                        <a:lnSpc>
+                          <a:spcPct val="115000"/>
+                        </a:lnSpc>
+                        <a:spcAft>
+                          <a:spcPts val="800"/>
+                        </a:spcAft>
+                        <a:buNone/>
+                      </a:pPr>
+                      <a:r>
+                        <a:rPr lang="en-US" sz="2800" kern="100">
+                          <a:effectLst/>
+                        </a:rPr>
+                        <a:t>cab</a:t>
+                      </a:r>
+                      <a:endParaRPr lang="en-US" sz="1200" kern="100">
+                        <a:effectLst/>
+                        <a:latin typeface="Aptos" panose="020B0004020202020204" pitchFamily="34" charset="0"/>
+                        <a:ea typeface="Aptos" panose="020B0004020202020204" pitchFamily="34" charset="0"/>
+                        <a:cs typeface="Times New Roman" panose="02020603050405020304" pitchFamily="18" charset="0"/>
+                      </a:endParaRPr>
+                    </a:p>
+                  </a:txBody>
+                  <a:tcPr marL="68580" marR="68580" marT="0" marB="0" anchor="ctr"/>
+                </a:tc>
+                <a:tc>
+                  <a:txBody>
+                    <a:bodyPr/>
+                    <a:lstStyle/>
+                    <a:p>
+                      <a:pPr marL="0" marR="0" algn="ctr">
+                        <a:lnSpc>
+                          <a:spcPct val="115000"/>
+                        </a:lnSpc>
+                        <a:spcAft>
+                          <a:spcPts val="800"/>
+                        </a:spcAft>
+                        <a:buNone/>
+                      </a:pPr>
+                      <a:r>
+                        <a:rPr lang="en-US" sz="2800" kern="100">
+                          <a:effectLst/>
+                        </a:rPr>
+                        <a:t>spit</a:t>
+                      </a:r>
+                      <a:endParaRPr lang="en-US" sz="1200" kern="100">
+                        <a:effectLst/>
+                        <a:latin typeface="Aptos" panose="020B0004020202020204" pitchFamily="34" charset="0"/>
+                        <a:ea typeface="Aptos" panose="020B0004020202020204" pitchFamily="34" charset="0"/>
+                        <a:cs typeface="Times New Roman" panose="02020603050405020304" pitchFamily="18" charset="0"/>
+                      </a:endParaRPr>
+                    </a:p>
+                  </a:txBody>
+                  <a:tcPr marL="68580" marR="68580" marT="0" marB="0" anchor="ctr"/>
+                </a:tc>
+                <a:tc>
+                  <a:txBody>
+                    <a:bodyPr/>
+                    <a:lstStyle/>
+                    <a:p>
+                      <a:pPr marL="0" marR="0" algn="ctr">
+                        <a:lnSpc>
+                          <a:spcPct val="115000"/>
+                        </a:lnSpc>
+                        <a:spcAft>
+                          <a:spcPts val="800"/>
+                        </a:spcAft>
+                        <a:buNone/>
+                      </a:pPr>
+                      <a:r>
+                        <a:rPr lang="en-US" sz="2800" kern="100">
+                          <a:effectLst/>
+                        </a:rPr>
+                        <a:t>peg</a:t>
+                      </a:r>
+                      <a:endParaRPr lang="en-US" sz="1200" kern="100">
+                        <a:effectLst/>
+                        <a:latin typeface="Aptos" panose="020B0004020202020204" pitchFamily="34" charset="0"/>
+                        <a:ea typeface="Aptos" panose="020B0004020202020204" pitchFamily="34" charset="0"/>
+                        <a:cs typeface="Times New Roman" panose="02020603050405020304" pitchFamily="18" charset="0"/>
+                      </a:endParaRPr>
+                    </a:p>
+                  </a:txBody>
+                  <a:tcPr marL="68580" marR="68580" marT="0" marB="0" anchor="ctr"/>
+                </a:tc>
+                <a:tc>
+                  <a:txBody>
+                    <a:bodyPr/>
+                    <a:lstStyle/>
+                    <a:p>
+                      <a:pPr marL="0" marR="0" algn="ctr">
+                        <a:lnSpc>
+                          <a:spcPct val="115000"/>
+                        </a:lnSpc>
+                        <a:spcAft>
+                          <a:spcPts val="800"/>
+                        </a:spcAft>
+                        <a:buNone/>
+                      </a:pPr>
+                      <a:r>
+                        <a:rPr lang="en-US" sz="2800" kern="100">
+                          <a:effectLst/>
+                        </a:rPr>
+                        <a:t>gas</a:t>
+                      </a:r>
+                      <a:endParaRPr lang="en-US" sz="1200" kern="100">
+                        <a:effectLst/>
+                        <a:latin typeface="Aptos" panose="020B0004020202020204" pitchFamily="34" charset="0"/>
+                        <a:ea typeface="Aptos" panose="020B0004020202020204" pitchFamily="34" charset="0"/>
+                        <a:cs typeface="Times New Roman" panose="02020603050405020304" pitchFamily="18" charset="0"/>
+                      </a:endParaRPr>
+                    </a:p>
+                  </a:txBody>
+                  <a:tcPr marL="68580" marR="68580" marT="0" marB="0" anchor="ctr"/>
+                </a:tc>
+                <a:tc>
+                  <a:txBody>
+                    <a:bodyPr/>
+                    <a:lstStyle/>
+                    <a:p>
+                      <a:pPr marL="0" marR="0" algn="ctr">
+                        <a:lnSpc>
+                          <a:spcPct val="115000"/>
+                        </a:lnSpc>
+                        <a:spcAft>
+                          <a:spcPts val="800"/>
+                        </a:spcAft>
+                        <a:buNone/>
+                      </a:pPr>
+                      <a:r>
+                        <a:rPr lang="en-US" sz="2800" kern="100" dirty="0">
+                          <a:effectLst/>
+                        </a:rPr>
+                        <a:t>shop</a:t>
+                      </a:r>
+                      <a:endParaRPr lang="en-US" sz="1200" kern="100" dirty="0">
+                        <a:effectLst/>
+                        <a:latin typeface="Aptos" panose="020B0004020202020204" pitchFamily="34" charset="0"/>
+                        <a:ea typeface="Aptos" panose="020B0004020202020204" pitchFamily="34" charset="0"/>
+                        <a:cs typeface="Times New Roman" panose="02020603050405020304" pitchFamily="18" charset="0"/>
+                      </a:endParaRPr>
+                    </a:p>
+                  </a:txBody>
+                  <a:tcPr marL="68580" marR="68580" marT="0" marB="0" anchor="ctr"/>
+                </a:tc>
+                <a:tc>
+                  <a:txBody>
+                    <a:bodyPr/>
+                    <a:lstStyle/>
+                    <a:p>
+                      <a:pPr marL="0" marR="0" algn="ctr">
+                        <a:lnSpc>
+                          <a:spcPct val="115000"/>
+                        </a:lnSpc>
+                        <a:spcAft>
+                          <a:spcPts val="800"/>
+                        </a:spcAft>
+                        <a:buNone/>
+                      </a:pPr>
+                      <a:r>
+                        <a:rPr lang="en-US" sz="2800" kern="100" dirty="0">
+                          <a:effectLst/>
+                        </a:rPr>
+                        <a:t>skill</a:t>
+                      </a:r>
+                      <a:endParaRPr lang="en-US" sz="1200" kern="100" dirty="0">
+                        <a:effectLst/>
+                        <a:latin typeface="Aptos" panose="020B0004020202020204" pitchFamily="34" charset="0"/>
+                        <a:ea typeface="Aptos" panose="020B0004020202020204" pitchFamily="34" charset="0"/>
+                        <a:cs typeface="Times New Roman" panose="02020603050405020304" pitchFamily="18" charset="0"/>
+                      </a:endParaRPr>
+                    </a:p>
+                  </a:txBody>
+                  <a:tcPr marL="68580" marR="68580" marT="0" marB="0" anchor="ctr"/>
+                </a:tc>
+                <a:extLst>
+                  <a:ext uri="{0D108BD9-81ED-4DB2-BD59-A6C34878D82A}">
+                    <a16:rowId xmlns:a16="http://schemas.microsoft.com/office/drawing/2014/main" val="2202507404"/>
+                  </a:ext>
+                </a:extLst>
+              </a:tr>
+            </a:tbl>
+          </a:graphicData>
+        </a:graphic>
+      </p:graphicFrame>
+      <p:sp>
+        <p:nvSpPr>
+          <p:cNvPr id="4" name="TextBox 3">
+            <a:extLst>
+              <a:ext uri="{FF2B5EF4-FFF2-40B4-BE49-F238E27FC236}">
+                <a16:creationId xmlns:a16="http://schemas.microsoft.com/office/drawing/2014/main" id="{C56EC7A2-137A-ECDB-F84B-BCCD264FBF05}"/>
+              </a:ext>
+            </a:extLst>
+          </p:cNvPr>
+          <p:cNvSpPr txBox="1"/>
+          <p:nvPr/>
+        </p:nvSpPr>
+        <p:spPr>
+          <a:xfrm>
+            <a:off x="2825819" y="879503"/>
+            <a:ext cx="6097836" cy="697755"/>
+          </a:xfrm>
+          <a:prstGeom prst="rect">
+            <a:avLst/>
+          </a:prstGeom>
+          <a:noFill/>
+        </p:spPr>
+        <p:txBody>
+          <a:bodyPr wrap="square">
+            <a:spAutoFit/>
+          </a:bodyPr>
+          <a:lstStyle/>
+          <a:p>
+            <a:pPr marL="0" marR="0" algn="ctr">
+              <a:lnSpc>
+                <a:spcPct val="115000"/>
+              </a:lnSpc>
+              <a:spcAft>
+                <a:spcPts val="800"/>
+              </a:spcAft>
+              <a:buNone/>
+            </a:pPr>
+            <a:r>
+              <a:rPr lang="en-US" sz="1800" kern="100" dirty="0">
+                <a:effectLst/>
+                <a:latin typeface="BITSTREAM IOWAN OLD STYLE BT" panose="02040602040506020204" pitchFamily="18" charset="0"/>
+                <a:ea typeface="Aptos" panose="020B0004020202020204" pitchFamily="34" charset="0"/>
+                <a:cs typeface="Times New Roman" panose="02020603050405020304" pitchFamily="18" charset="0"/>
+              </a:rPr>
+              <a:t>Record yourself saying the following words:</a:t>
+            </a:r>
+            <a:endParaRPr lang="en-US" sz="1100" kern="100" dirty="0">
+              <a:effectLst/>
+              <a:latin typeface="Aptos" panose="020B0004020202020204" pitchFamily="34" charset="0"/>
+              <a:ea typeface="Aptos" panose="020B0004020202020204" pitchFamily="34" charset="0"/>
+              <a:cs typeface="Times New Roman" panose="02020603050405020304" pitchFamily="18" charset="0"/>
+            </a:endParaRPr>
+          </a:p>
+          <a:p>
+            <a:pPr marL="0" marR="0">
+              <a:lnSpc>
+                <a:spcPct val="115000"/>
+              </a:lnSpc>
+              <a:spcAft>
+                <a:spcPts val="800"/>
+              </a:spcAft>
+              <a:buNone/>
+            </a:pPr>
+            <a:r>
+              <a:rPr lang="en-US" sz="1100" kern="100" dirty="0">
+                <a:effectLst/>
+                <a:latin typeface="BITSTREAM IOWAN OLD STYLE BT" panose="02040602040506020204" pitchFamily="18" charset="0"/>
+                <a:ea typeface="Aptos" panose="020B0004020202020204" pitchFamily="34" charset="0"/>
+                <a:cs typeface="Times New Roman" panose="02020603050405020304" pitchFamily="18" charset="0"/>
+              </a:rPr>
+              <a:t> </a:t>
+            </a:r>
+            <a:endParaRPr lang="en-US" sz="1100" kern="100" dirty="0">
+              <a:effectLst/>
+              <a:latin typeface="Aptos" panose="020B0004020202020204" pitchFamily="34" charset="0"/>
+              <a:ea typeface="Aptos" panose="020B0004020202020204" pitchFamily="34" charset="0"/>
+              <a:cs typeface="Times New Roman" panose="02020603050405020304" pitchFamily="18" charset="0"/>
+            </a:endParaRPr>
+          </a:p>
+        </p:txBody>
+      </p:sp>
+    </p:spTree>
+    <p:extLst>
+      <p:ext uri="{BB962C8B-B14F-4D97-AF65-F5344CB8AC3E}">
+        <p14:creationId xmlns:p14="http://schemas.microsoft.com/office/powerpoint/2010/main" val="1395768280"/>
       </p:ext>
     </p:extLst>
   </p:cSld>
